--- a/artifacts/speaking-portfolio-expanded/decks/benchmarks-30min-screen.pptx
+++ b/artifacts/speaking-portfolio-expanded/decks/benchmarks-30min-screen.pptx
@@ -1869,99 +1869,99 @@
                 <a:ea typeface="Arial"/>
                 <a:cs typeface="Arial"/>
               </a:rPr>
-              <a:t xml:space="preserve">The suite is an instrument. Test the instrument. Then use it to make a decision.</a:t>
-            </a:r>
-            <a:endParaRPr lang="en-US" sz="1200"/>
-          </a:p>
-          <a:p>
-            <a:pPr marL="0" indent="0">
-              <a:lnSpc>
-                <a:spcPts val="1560"/>
-              </a:lnSpc>
-              <a:spcAft>
-                <a:spcPts val="0"/>
-              </a:spcAft>
-              <a:buNone/>
-            </a:pPr>
-            <a:r>
-              <a:rPr lang="en-US" sz="1200" b="0">
-                <a:solidFill>
-                  <a:srgbClr val="202b33"/>
-                </a:solidFill>
-                <a:latin typeface="Arial"/>
-                <a:ea typeface="Arial"/>
-                <a:cs typeface="Arial"/>
-              </a:rPr>
-              <a:t xml:space="preserve"/>
-            </a:r>
-            <a:endParaRPr lang="en-US" sz="1200"/>
-          </a:p>
-          <a:p>
-            <a:pPr marL="0" indent="0">
-              <a:lnSpc>
-                <a:spcPts val="1560"/>
-              </a:lnSpc>
-              <a:spcAft>
-                <a:spcPts val="0"/>
-              </a:spcAft>
-              <a:buNone/>
-            </a:pPr>
-            <a:r>
-              <a:rPr lang="en-US" sz="1200" b="0">
-                <a:solidFill>
-                  <a:srgbClr val="202b33"/>
-                </a:solidFill>
-                <a:latin typeface="Arial"/>
-                <a:ea typeface="Arial"/>
-                <a:cs typeface="Arial"/>
-              </a:rPr>
-              <a:t xml:space="preserve"/>
-            </a:r>
-            <a:endParaRPr lang="en-US" sz="1200"/>
-          </a:p>
-          <a:p>
-            <a:pPr marL="0" indent="0">
-              <a:lnSpc>
-                <a:spcPts val="1560"/>
-              </a:lnSpc>
-              <a:spcAft>
-                <a:spcPts val="0"/>
-              </a:spcAft>
-              <a:buNone/>
-            </a:pPr>
-            <a:r>
-              <a:rPr lang="en-US" sz="1200" b="0">
-                <a:solidFill>
-                  <a:srgbClr val="202b33"/>
-                </a:solidFill>
-                <a:latin typeface="Arial"/>
-                <a:ea typeface="Arial"/>
-                <a:cs typeface="Arial"/>
-              </a:rPr>
-              <a:t xml:space="preserve"/>
-            </a:r>
-            <a:endParaRPr lang="en-US" sz="1200"/>
-          </a:p>
-          <a:p>
-            <a:pPr marL="0" indent="0">
-              <a:lnSpc>
-                <a:spcPts val="1560"/>
-              </a:lnSpc>
-              <a:spcAft>
-                <a:spcPts val="0"/>
-              </a:spcAft>
-              <a:buNone/>
-            </a:pPr>
-            <a:r>
-              <a:rPr lang="en-US" sz="1200" b="0">
-                <a:solidFill>
-                  <a:srgbClr val="202b33"/>
-                </a:solidFill>
-                <a:latin typeface="Arial"/>
-                <a:ea typeface="Arial"/>
-                <a:cs typeface="Arial"/>
-              </a:rPr>
-              <a:t xml:space="preserve"/>
+              <a:t xml:space="preserve">The suite is an instrument. Test the instrument.</a:t>
+            </a:r>
+            <a:endParaRPr lang="en-US" sz="1200"/>
+          </a:p>
+          <a:p>
+            <a:pPr marL="0" indent="0">
+              <a:lnSpc>
+                <a:spcPts val="1560"/>
+              </a:lnSpc>
+              <a:spcAft>
+                <a:spcPts val="0"/>
+              </a:spcAft>
+              <a:buNone/>
+            </a:pPr>
+            <a:r>
+              <a:rPr lang="en-US" sz="1200" b="0">
+                <a:solidFill>
+                  <a:srgbClr val="202b33"/>
+                </a:solidFill>
+                <a:latin typeface="Arial"/>
+                <a:ea typeface="Arial"/>
+                <a:cs typeface="Arial"/>
+              </a:rPr>
+              <a:t xml:space="preserve"/>
+            </a:r>
+            <a:endParaRPr lang="en-US" sz="1200"/>
+          </a:p>
+          <a:p>
+            <a:pPr marL="0" indent="0">
+              <a:lnSpc>
+                <a:spcPts val="1560"/>
+              </a:lnSpc>
+              <a:spcAft>
+                <a:spcPts val="0"/>
+              </a:spcAft>
+              <a:buNone/>
+            </a:pPr>
+            <a:r>
+              <a:rPr lang="en-US" sz="1200" b="0">
+                <a:solidFill>
+                  <a:srgbClr val="202b33"/>
+                </a:solidFill>
+                <a:latin typeface="Arial"/>
+                <a:ea typeface="Arial"/>
+                <a:cs typeface="Arial"/>
+              </a:rPr>
+              <a:t xml:space="preserve"/>
+            </a:r>
+            <a:endParaRPr lang="en-US" sz="1200"/>
+          </a:p>
+          <a:p>
+            <a:pPr marL="0" indent="0">
+              <a:lnSpc>
+                <a:spcPts val="1560"/>
+              </a:lnSpc>
+              <a:spcAft>
+                <a:spcPts val="0"/>
+              </a:spcAft>
+              <a:buNone/>
+            </a:pPr>
+            <a:r>
+              <a:rPr lang="en-US" sz="1200" b="0">
+                <a:solidFill>
+                  <a:srgbClr val="202b33"/>
+                </a:solidFill>
+                <a:latin typeface="Arial"/>
+                <a:ea typeface="Arial"/>
+                <a:cs typeface="Arial"/>
+              </a:rPr>
+              <a:t xml:space="preserve"/>
+            </a:r>
+            <a:endParaRPr lang="en-US" sz="1200"/>
+          </a:p>
+          <a:p>
+            <a:pPr marL="0" indent="0">
+              <a:lnSpc>
+                <a:spcPts val="1560"/>
+              </a:lnSpc>
+              <a:spcAft>
+                <a:spcPts val="0"/>
+              </a:spcAft>
+              <a:buNone/>
+            </a:pPr>
+            <a:r>
+              <a:rPr lang="en-US" sz="1200" b="0">
+                <a:solidFill>
+                  <a:srgbClr val="202b33"/>
+                </a:solidFill>
+                <a:latin typeface="Arial"/>
+                <a:ea typeface="Arial"/>
+                <a:cs typeface="Arial"/>
+              </a:rPr>
+              <a:t xml:space="preserve">Stop talking.</a:t>
             </a:r>
             <a:endParaRPr lang="en-US" sz="1200"/>
           </a:p>
@@ -2396,7 +2396,7 @@
                 <a:ea typeface="Arial"/>
                 <a:cs typeface="Arial"/>
               </a:rPr>
-              <a:t xml:space="preserve">Prices can help choose among acceptable systems. They cannot tell us which systems are acceptable. The cost-per-success arithmetic belongs to Cry Me a Free Tier. Today the question is whether this score means anything.</a:t>
+              <a:t xml:space="preserve">Prices can help choose among acceptable systems. They cannot tell us which systems are acceptable. The cost-per-success arithmetic belongs to Buy Me a Free Tier. Today the question is whether this score means anything.</a:t>
             </a:r>
             <a:endParaRPr lang="en-US" sz="1200"/>
           </a:p>
@@ -2923,7 +2923,7 @@
                 <a:ea typeface="Arial"/>
                 <a:cs typeface="Arial"/>
               </a:rPr>
-              <a:t xml:space="preserve">Campbell (1979), [Assessing the impact of planned social change](https://doi.org/10.1016/0149-7189%2879%2990048-X). Strathern (1997), [Improving ratings](https://gwern.net/doc/statistics/decision/1997-strathern.pdf), European Review 5(3), 305–321. Formulations above are paraphrases.</a:t>
+              <a:t xml:space="preserve">Goodhart (1975), Problems of Monetary Management: The U.K. Experience, Reserve Bank of Australia conference paper (reprinted 1981). Campbell (1979), [Assessing the impact of planned social change](https://doi.org/10.1016/0149-7189%2879%2990048-X). Strathern (1997), [Improving ratings](https://gwern.net/doc/statistics/decision/1997-strathern.pdf), European Review 5(3), 305–321. Formulations above are attributed paraphrases, not claims that every optimized benchmark has stopped measuring anything.</a:t>
             </a:r>
             <a:endParaRPr lang="en-US" sz="1200"/>
           </a:p>
@@ -4985,7 +4985,7 @@
                 <a:ea typeface="Arial"/>
                 <a:cs typeface="Arial"/>
               </a:rPr>
-              <a:t xml:space="preserve">Dan Levy, [Auto-Tune Your LLM Judge](https://danlevy.net/auto-tune-your-llm-judge/), supplied article. The sequence is reused as a teaching fixture, not a fresh measurement.</a:t>
+              <a:t xml:space="preserve">Dan Levy, [Auto-Tune Your LLM Judge](https://danlevy.net/auto-tune-your-llm-judge/), danlevy.net, 11 August 2026. The sequence is reused as a teaching fixture, not a fresh measurement.</a:t>
             </a:r>
             <a:endParaRPr lang="en-US" sz="1200"/>
           </a:p>
@@ -6085,7 +6085,7 @@
                 <a:ea typeface="Arial"/>
                 <a:cs typeface="Arial"/>
               </a:rPr>
-              <a:t xml:space="preserve">Cohen (1960), [A Coefficient of Agreement for Nominal Scales](https://journals.sagepub.com/doi/abs/10.1177/001316446002000104). Feinstein and Cicchetti (1990), [High agreement but low kappa](https://pubmed.ncbi.nlm.nih.gov/2348207/). [Position bias study](https://arxiv.org/abs/2406.07791); [Self-Preference Bias in LLM-as-a-Judge](https://arxiv.org/abs/2410.21819).</a:t>
+              <a:t xml:space="preserve">Cohen (1960), [A Coefficient of Agreement for Nominal Scales](https://journals.sagepub.com/doi/abs/10.1177/001316446002000104). Feinstein and Cicchetti (1990), [High agreement but low kappa](https://pubmed.ncbi.nlm.nih.gov/2348207/). Shi et al. (2024), [Judging the Judges: position bias in pairwise LLM comparisons](https://arxiv.org/abs/2406.07791). Wataoka et al. (2024), [Self-Preference Bias in LLM-as-a-Judge](https://arxiv.org/abs/2410.21819).</a:t>
             </a:r>
             <a:endParaRPr lang="en-US" sz="1200"/>
           </a:p>
@@ -6410,30 +6410,7 @@
                 <a:ea typeface="Arial"/>
                 <a:cs typeface="Arial"/>
               </a:rPr>
-              <a:t xml:space="preserve">A leaderboard, and the question it isn't</a:t>
-            </a:r>
-            <a:endParaRPr lang="en-US" sz="3900"/>
-          </a:p>
-          <a:p>
-            <a:pPr marL="0" indent="0">
-              <a:lnSpc>
-                <a:spcPts val="4680"/>
-              </a:lnSpc>
-              <a:spcAft>
-                <a:spcPts val="0"/>
-              </a:spcAft>
-              <a:buNone/>
-            </a:pPr>
-            <a:r>
-              <a:rPr lang="en-US" sz="3900" b="1">
-                <a:solidFill>
-                  <a:srgbClr val="F5F1E9"/>
-                </a:solidFill>
-                <a:latin typeface="Arial"/>
-                <a:ea typeface="Arial"/>
-                <a:cs typeface="Arial"/>
-              </a:rPr>
-              <a:t xml:space="preserve">answering</a:t>
+              <a:t xml:space="preserve">Tuxedo of Benchmarks</a:t>
             </a:r>
             <a:endParaRPr lang="en-US" sz="3900"/>
           </a:p>
@@ -7381,7 +7358,7 @@
                 <a:ea typeface="Arial"/>
                 <a:cs typeface="Arial"/>
               </a:rPr>
-              <a:t xml:space="preserve">Make it a release gate</a:t>
+              <a:t xml:space="preserve">Write the Rejection Rule First</a:t>
             </a:r>
             <a:endParaRPr lang="en-US" sz="3900"/>
           </a:p>
@@ -9202,7 +9179,7 @@
                 <a:ea typeface="Arial"/>
                 <a:cs typeface="Arial"/>
               </a:rPr>
-              <a:t xml:space="preserve">Your eval suite is a measuring instrument</a:t>
+              <a:t xml:space="preserve">Your Eval Suite Needs Therapy</a:t>
             </a:r>
             <a:endParaRPr lang="en-US" sz="3900"/>
           </a:p>
@@ -10477,7 +10454,7 @@
                 <a:ea typeface="Arial"/>
                 <a:cs typeface="Arial"/>
               </a:rPr>
-              <a:t xml:space="preserve">Run it five times</a:t>
+              <a:t xml:space="preserve">Run the Judges</a:t>
             </a:r>
             <a:endParaRPr lang="en-US" sz="3900"/>
           </a:p>
@@ -11000,7 +10977,7 @@
                 <a:ea typeface="Arial"/>
                 <a:cs typeface="Arial"/>
               </a:rPr>
-              <a:t xml:space="preserve">Twenty green cases. About one in seven.</a:t>
+              <a:t xml:space="preserve">Twenty for Twenty, One in Seven</a:t>
             </a:r>
             <a:endParaRPr lang="en-US" sz="3900"/>
           </a:p>
@@ -11030,7 +11007,7 @@
       </p:sp>
       <p:pic>
         <p:nvPicPr>
-          <p:cNvPr id="5" name="5d9d88671737e342604a8bb2f8a50f9753e84270f97998346745671bda4153b9" descr="Twenty green cases. About one in seven."/>
+          <p:cNvPr id="5" name="5d9d88671737e342604a8bb2f8a50f9753e84270f97998346745671bda4153b9" descr="Twenty for Twenty, One in Seven"/>
           <p:cNvPicPr>
             <a:picLocks noChangeAspect="1"/>
           </p:cNvPicPr>
@@ -11284,7 +11261,7 @@
                 <a:ea typeface="Arial"/>
                 <a:cs typeface="Arial"/>
               </a:rPr>
-              <a:t xml:space="preserve">Your grader is an instrument too</a:t>
+              <a:t xml:space="preserve">Agreeable to a Fault (κ = 0)</a:t>
             </a:r>
             <a:endParaRPr lang="en-US" sz="3900"/>
           </a:p>
